--- a/DBTUNING/ch10_Subquery_EXISTS_IN/ch10_교안.pptx
+++ b/DBTUNING/ch10_Subquery_EXISTS_IN/ch10_교안.pptx
@@ -548,7 +548,7 @@
           <a:lstStyle/>
           <a:p>
             <a:r>
-              <a:t>제8장은 Chapter 1에서 다룬 IN·EXISTS·JOIN 비교의 후속편이다. 같은 서브쿼리라도 SELECT 절에 놓이는지, FROM 절에 놓이는지, WHERE 절에서 바깥 값을 참조하는지에 따라 옵티마이저가 서로 다른 실행 구조를 만들어 낸다. 이 장이 전하려는 메시지는 하나다. 서브쿼리 성능을 결정하는 것은 문법의 모양이 아니라 옵티마이저가 만들어 낸 물리적 실행 구조라는 점이다. 첫 시간에 스칼라 서브쿼리가 행마다 실행될 것 같은지 손을 들어 보게 하고, 뒤에서 실측 결과와 대조하면 몰입도가 크게 올라간다.</a:t>
+              <a:t>제ch10은 ch01에서 다룬 IN·EXISTS·JOIN 비교의 후속편이다. 같은 서브쿼리라도 SELECT 절에 놓이는지, FROM 절에 놓이는지, WHERE 절에서 바깥 값을 참조하는지에 따라 옵티마이저가 서로 다른 실행 구조를 만들어 낸다. 이 장이 전하려는 메시지는 하나다. 서브쿼리 성능을 결정하는 것은 문법의 모양이 아니라 옵티마이저가 만들어 낸 물리적 실행 구조라는 점이다. 첫 시간에 스칼라 서브쿼리가 행마다 실행될 것 같은지 손을 들어 보게 하고, 뒤에서 실측 결과와 대조하면 몰입도가 크게 올라간다.</a:t>
             </a:r>
           </a:p>
         </p:txBody>
@@ -1248,7 +1248,7 @@
           <a:lstStyle/>
           <a:p>
             <a:r>
-              <a:t>소재를 설명할 때 조건 절의 의미를 정확히 짚어 준다. HOSP_ID가 5 이하라는 조건은 결과를 줄이려는 목적도 있지만, 스칼라 서브쿼리가 참조하는 값의 종류를 5로 고정하려는 의도적 설계다. 이 설계를 알려 주지 않으면 학습자는 뒤의 결과를 일반적인 결론으로 받아들이기 쉽다. 결과 행이 15,029건으로 같다는 사실도 미리 확인시켜야 한다. 결과가 같아야 비용 비교가 성립한다는 Chapter 1의 전제가 여기서도 그대로 적용되기 때문이다.</a:t>
+              <a:t>소재를 설명할 때 조건 절의 의미를 정확히 짚어 준다. HOSP_ID가 5 이하라는 조건은 결과를 줄이려는 목적도 있지만, 스칼라 서브쿼리가 참조하는 값의 종류를 5로 고정하려는 의도적 설계다. 이 설계를 알려 주지 않으면 학습자는 뒤의 결과를 일반적인 결론으로 받아들이기 쉽다. 결과 행이 15,029건으로 같다는 사실도 미리 확인시켜야 한다. 결과가 같아야 비용 비교가 성립한다는 ch01의 전제가 여기서도 그대로 적용되기 때문이다.</a:t>
             </a:r>
           </a:p>
         </p:txBody>
@@ -2858,7 +2858,7 @@
           <a:lstStyle/>
           <a:p>
             <a:r>
-              <a:t>Chapter 1에서 IN과 EXISTS를 이미 다뤘기 때문에 학습자가 서브쿼리는 끝난 주제라고 생각하기 쉽다. 이 절의 목적은 그 오해를 먼저 깨는 것이다. Chapter 1에서 본 것은 존재 여부 확인이라는 한 가지 쓰임새였고, 서브쿼리에는 값 하나를 붙여 오는 용도, 중간 결과 집합을 만드는 용도, 바깥 행마다 기준값을 계산하는 용도가 더 있다. 세 가지 쓰임새를 먼저 나열해 두면 뒤에 나오는 세 실측 사례가 각각 어디에 대응하는지 학습자가 스스로 연결한다.</a:t>
+              <a:t>ch01에서 IN과 EXISTS를 이미 다뤘기 때문에 학습자가 서브쿼리는 끝난 주제라고 생각하기 쉽다. 이 절의 목적은 그 오해를 먼저 깨는 것이다. ch01에서 본 것은 존재 여부 확인이라는 한 가지 쓰임새였고, 서브쿼리에는 값 하나를 붙여 오는 용도, 중간 결과 집합을 만드는 용도, 바깥 행마다 기준값을 계산하는 용도가 더 있다. 세 가지 쓰임새를 먼저 나열해 두면 뒤에 나오는 세 실측 사례가 각각 어디에 대응하는지 학습자가 스스로 연결한다.</a:t>
             </a:r>
           </a:p>
         </p:txBody>
@@ -3208,7 +3208,7 @@
           <a:lstStyle/>
           <a:p>
             <a:r>
-              <a:t>실습문제 10번의 종합 정리 슬라이드다. 학습자에게 이 문장을 각자의 말로 다시 써 보게 하면 이해도가 그대로 드러난다. 핵심 키워드는 물리적 실행 구조와 몇 번 읽는가 두 가지다. 세 사례를 각각 한 문장으로 요약하고 그 위에 공통 원칙을 얹는 구조로 답을 쓰게 하면 채점 기준도 명확해진다. 여기서 Chapter 1의 결론과도 연결해 준다. 실측으로 고른다는 원칙이 이번 장에서 어떻게 구체화됐는지 짚으면 과정 전체의 흐름이 이어진다.</a:t>
+              <a:t>실습문제 10번의 종합 정리 슬라이드다. 학습자에게 이 문장을 각자의 말로 다시 써 보게 하면 이해도가 그대로 드러난다. 핵심 키워드는 물리적 실행 구조와 몇 번 읽는가 두 가지다. 세 사례를 각각 한 문장으로 요약하고 그 위에 공통 원칙을 얹는 구조로 답을 쓰게 하면 채점 기준도 명확해진다. 여기서 ch01의 결론과도 연결해 준다. 실측으로 고른다는 원칙이 이번 장에서 어떻게 구체화됐는지 짚으면 과정 전체의 흐름이 이어진다.</a:t>
             </a:r>
           </a:p>
         </p:txBody>
@@ -3488,7 +3488,7 @@
           <a:lstStyle/>
           <a:p>
             <a:r>
-              <a:t>Chapter 1의 결론을 한 줄로 복기시키는 슬라이드다. 학습자가 흔히 오해하는 지점은 실측으로 고른다는 원칙을 한 번 배우면 끝나는 지식으로 여기는 것이다. 실제로는 사례마다 결론이 달라지기 때문에 매번 다시 적용해야 하는 절차에 가깝다. IN과 EXISTS가 같은 세미조인으로 변환됐다는 사실을 여기서 다시 꺼내 두면, 뒤에서 상관 서브쿼리가 VW_SQ_1이라는 뷰로 변환되는 장면을 볼 때 학습자가 낯설어하지 않는다. 변환은 예외가 아니라 기본 동작이라는 점을 강조한다.</a:t>
+              <a:t>ch01의 결론을 한 줄로 복기시키는 슬라이드다. 학습자가 흔히 오해하는 지점은 실측으로 고른다는 원칙을 한 번 배우면 끝나는 지식으로 여기는 것이다. 실제로는 사례마다 결론이 달라지기 때문에 매번 다시 적용해야 하는 절차에 가깝다. IN과 EXISTS가 같은 세미조인으로 변환됐다는 사실을 여기서 다시 꺼내 두면, 뒤에서 상관 서브쿼리가 VW_SQ_1이라는 뷰로 변환되는 장면을 볼 때 학습자가 낯설어하지 않는다. 변환은 예외가 아니라 기본 동작이라는 점을 강조한다.</a:t>
             </a:r>
           </a:p>
         </p:txBody>
@@ -6855,7 +6855,7 @@
                 </a:solidFill>
                 <a:latin typeface="Malgun Gothic"/>
               </a:rPr>
-              <a:t>Oracle SQL 튜닝 과정  ·  제8장</a:t>
+              <a:t>Oracle SQL 튜닝 과정  ·  제ch10</a:t>
             </a:r>
           </a:p>
         </p:txBody>
@@ -7331,7 +7331,7 @@
                 </a:solidFill>
                 <a:latin typeface="Malgun Gothic"/>
               </a:rPr>
-              <a:t>    –  Chapter 1에서 본 EXISTS 서브쿼리도 상관 서브쿼리의 한 예였다</a:t>
+              <a:t>    –  ch01에서 본 EXISTS 서브쿼리도 상관 서브쿼리의 한 예였다</a:t>
             </a:r>
           </a:p>
           <a:p>
@@ -7590,7 +7590,7 @@
                 </a:solidFill>
                 <a:latin typeface="Malgun Gothic"/>
               </a:rPr>
-              <a:t>•  Chapter 1에서 이미 그 증거를 봤다</a:t>
+              <a:t>•  ch01에서 이미 그 증거를 봤다</a:t>
             </a:r>
           </a:p>
           <a:p>
@@ -12364,7 +12364,7 @@
                 </a:solidFill>
                 <a:latin typeface="Malgun Gothic"/>
               </a:rPr>
-              <a:t>•  8.1  Why — Chapter 1 이후, 서브쿼리의 나머지 얼굴들</a:t>
+              <a:t>•  8.1  Why — ch01 이후, 서브쿼리의 나머지 얼굴들</a:t>
             </a:r>
           </a:p>
           <a:p>
@@ -15284,7 +15284,7 @@
                 </a:solidFill>
                 <a:latin typeface="Malgun Gothic"/>
               </a:rPr>
-              <a:t>Chapter 1 이후, 서브쿼리의 나머지 얼굴들</a:t>
+              <a:t>ch01 이후, 서브쿼리의 나머지 얼굴들</a:t>
             </a:r>
           </a:p>
         </p:txBody>
@@ -15362,7 +15362,7 @@
                 </a:solidFill>
                 <a:latin typeface="Malgun Gothic"/>
               </a:rPr>
-              <a:t>•  Chapter 1이 세운 원칙</a:t>
+              <a:t>•  ch01이 세운 원칙</a:t>
             </a:r>
           </a:p>
           <a:p>
@@ -17459,7 +17459,7 @@
                 </a:solidFill>
                 <a:latin typeface="Malgun Gothic"/>
               </a:rPr>
-              <a:t>•  실습문제 10문항 — SQL튜닝_Ch08_문제.md</a:t>
+              <a:t>•  실습문제 10문항 — ch10_문제.md</a:t>
             </a:r>
           </a:p>
           <a:p>
@@ -17673,7 +17673,7 @@
                 </a:solidFill>
                 <a:latin typeface="Malgun Gothic"/>
               </a:rPr>
-              <a:t>Chapter 1이 세운 원칙</a:t>
+              <a:t>ch01이 세운 원칙</a:t>
             </a:r>
           </a:p>
         </p:txBody>
@@ -17707,7 +17707,7 @@
                 </a:solidFill>
                 <a:latin typeface="Malgun Gothic"/>
               </a:rPr>
-              <a:t>•  Chapter 1의 결론 — 결과가 같은 여러 SQL 중에서 실측으로 고른다</a:t>
+              <a:t>•  ch01의 결론 — 결과가 같은 여러 SQL 중에서 실측으로 고른다</a:t>
             </a:r>
           </a:p>
           <a:p>
@@ -17795,7 +17795,7 @@
                 </a:solidFill>
                 <a:latin typeface="Malgun Gothic"/>
               </a:rPr>
-              <a:t>    –  판단 기준은 Chapter 1과 동일하다 — 실측된 실행계획과 자원 소비량</a:t>
+              <a:t>    –  판단 기준은 ch01과 동일하다 — 실측된 실행계획과 자원 소비량</a:t>
             </a:r>
           </a:p>
         </p:txBody>
@@ -17977,7 +17977,7 @@
                 </a:solidFill>
                 <a:latin typeface="Malgun Gothic"/>
               </a:rPr>
-              <a:t>•  Chapter 1에서 다룬 것은 WHERE 절의 존재 여부 확인 한 가지였다</a:t>
+              <a:t>•  ch01에서 다룬 것은 WHERE 절의 존재 여부 확인 한 가지였다</a:t>
             </a:r>
           </a:p>
           <a:p>
@@ -18247,7 +18247,7 @@
                 </a:solidFill>
                 <a:latin typeface="Malgun Gothic"/>
               </a:rPr>
-              <a:t>•  판단 지표는 Chapter 1과 같다</a:t>
+              <a:t>•  판단 지표는 ch01과 같다</a:t>
             </a:r>
           </a:p>
           <a:p>

--- a/DBTUNING/ch10_Subquery_EXISTS_IN/ch10_교안.pptx
+++ b/DBTUNING/ch10_Subquery_EXISTS_IN/ch10_교안.pptx
@@ -548,7 +548,7 @@
           <a:lstStyle/>
           <a:p>
             <a:r>
-              <a:t>제ch10은 ch01에서 다룬 IN·EXISTS·JOIN 비교의 후속편이다. 같은 서브쿼리라도 SELECT 절에 놓이는지, FROM 절에 놓이는지, WHERE 절에서 바깥 값을 참조하는지에 따라 옵티마이저가 서로 다른 실행 구조를 만들어 낸다. 이 장이 전하려는 메시지는 하나다. 서브쿼리 성능을 결정하는 것은 문법의 모양이 아니라 옵티마이저가 만들어 낸 물리적 실행 구조라는 점이다. 첫 시간에 스칼라 서브쿼리가 행마다 실행될 것 같은지 손을 들어 보게 하고, 뒤에서 실측 결과와 대조하면 몰입도가 크게 올라간다.</a:t>
+              <a:t>ch10은 ch01에서 다룬 IN·EXISTS·JOIN 비교의 후속편이다. 같은 서브쿼리라도 SELECT 절에 놓이는지, FROM 절에 놓이는지, WHERE 절에서 바깥 값을 참조하는지에 따라 옵티마이저가 서로 다른 실행 구조를 만들어 낸다. 이 장이 전하려는 메시지는 하나다. 서브쿼리 성능을 결정하는 것은 문법의 모양이 아니라 옵티마이저가 만들어 낸 물리적 실행 구조라는 점이다. 첫 시간에 스칼라 서브쿼리가 행마다 실행될 것 같은지 손을 들어 보게 하고, 뒤에서 실측 결과와 대조하면 몰입도가 크게 올라간다.</a:t>
             </a:r>
           </a:p>
         </p:txBody>
@@ -6855,7 +6855,7 @@
                 </a:solidFill>
                 <a:latin typeface="Malgun Gothic"/>
               </a:rPr>
-              <a:t>Oracle SQL 튜닝 과정  ·  제ch10</a:t>
+              <a:t>Oracle SQL 튜닝 과정  ·  ch10</a:t>
             </a:r>
           </a:p>
         </p:txBody>
